--- a/apps/resources/bundled_files/3-klass-jadybal-sabak-v2.pptx
+++ b/apps/resources/bundled_files/3-klass-jadybal-sabak-v2.pptx
@@ -5196,7 +5196,7 @@
                 </a:solidFill>
                 <a:latin typeface="PT Sans"/>
               </a:rPr>
-              <a:t>3-класс · Математика</a:t>
+              <a:t/>
             </a:r>
           </a:p>
         </p:txBody>
@@ -5688,7 +5688,7 @@
                 </a:solidFill>
                 <a:latin typeface="PT Sans"/>
               </a:rPr>
-              <a:t>3-класс ›</a:t>
+              <a:t/>
             </a:r>
           </a:p>
           <a:p>
@@ -6621,7 +6621,7 @@
                 </a:solidFill>
                 <a:latin typeface="PT Sans"/>
               </a:rPr>
-              <a:t>3-класс ›</a:t>
+              <a:t/>
             </a:r>
           </a:p>
           <a:p>
@@ -12672,7 +12672,7 @@
                 </a:solidFill>
                 <a:latin typeface="PT Sans"/>
               </a:rPr>
-              <a:t>3-класс ›</a:t>
+              <a:t/>
             </a:r>
           </a:p>
           <a:p>
@@ -15678,7 +15678,7 @@
                 </a:solidFill>
                 <a:latin typeface="PT Sans"/>
               </a:rPr>
-              <a:t>3-класс ›</a:t>
+              <a:t/>
             </a:r>
           </a:p>
           <a:p>
@@ -17008,7 +17008,7 @@
                 </a:solidFill>
                 <a:latin typeface="PT Sans"/>
               </a:rPr>
-              <a:t>3-класс ›</a:t>
+              <a:t/>
             </a:r>
           </a:p>
           <a:p>
@@ -17720,7 +17720,7 @@
                 </a:solidFill>
                 <a:latin typeface="PT Sans"/>
               </a:rPr>
-              <a:t>3-класс ›</a:t>
+              <a:t/>
             </a:r>
           </a:p>
           <a:p>
@@ -18393,7 +18393,7 @@
                 </a:solidFill>
                 <a:latin typeface="PT Sans"/>
               </a:rPr>
-              <a:t>3-класс ›</a:t>
+              <a:t/>
             </a:r>
           </a:p>
           <a:p>
@@ -20059,7 +20059,7 @@
                 </a:solidFill>
                 <a:latin typeface="PT Sans"/>
               </a:rPr>
-              <a:t>3-класс ›</a:t>
+              <a:t/>
             </a:r>
           </a:p>
           <a:p>
@@ -21143,7 +21143,7 @@
                 </a:solidFill>
                 <a:latin typeface="PT Sans"/>
               </a:rPr>
-              <a:t>3-класс ›</a:t>
+              <a:t/>
             </a:r>
           </a:p>
           <a:p>
@@ -22673,7 +22673,7 @@
                 </a:solidFill>
                 <a:latin typeface="PT Sans"/>
               </a:rPr>
-              <a:t>3-класс ›</a:t>
+              <a:t/>
             </a:r>
           </a:p>
           <a:p>
@@ -25027,7 +25027,7 @@
                 </a:solidFill>
                 <a:latin typeface="PT Sans"/>
               </a:rPr>
-              <a:t>3-класс ›</a:t>
+              <a:t/>
             </a:r>
           </a:p>
           <a:p>
@@ -26304,7 +26304,7 @@
                 </a:solidFill>
                 <a:latin typeface="PT Sans"/>
               </a:rPr>
-              <a:t>3-класс ›</a:t>
+              <a:t/>
             </a:r>
           </a:p>
           <a:p>
@@ -27732,7 +27732,7 @@
                 </a:solidFill>
                 <a:latin typeface="PT Sans"/>
               </a:rPr>
-              <a:t>3-класс ›</a:t>
+              <a:t/>
             </a:r>
           </a:p>
           <a:p>
@@ -29188,7 +29188,7 @@
                 </a:solidFill>
                 <a:latin typeface="PT Sans"/>
               </a:rPr>
-              <a:t>3-класс ›</a:t>
+              <a:t/>
             </a:r>
           </a:p>
           <a:p>
@@ -30454,7 +30454,7 @@
                 </a:solidFill>
                 <a:latin typeface="PT Sans"/>
               </a:rPr>
-              <a:t>3-класс ›</a:t>
+              <a:t/>
             </a:r>
           </a:p>
           <a:p>
@@ -31254,7 +31254,7 @@
                 </a:solidFill>
                 <a:latin typeface="PT Sans"/>
               </a:rPr>
-              <a:t>3-класс ›</a:t>
+              <a:t/>
             </a:r>
           </a:p>
           <a:p>
@@ -32095,7 +32095,7 @@
                 </a:solidFill>
                 <a:latin typeface="PT Sans"/>
               </a:rPr>
-              <a:t>3-класс ›</a:t>
+              <a:t/>
             </a:r>
           </a:p>
           <a:p>
@@ -33044,7 +33044,7 @@
                 </a:solidFill>
                 <a:latin typeface="PT Sans"/>
               </a:rPr>
-              <a:t>3-класс ›</a:t>
+              <a:t/>
             </a:r>
           </a:p>
           <a:p>
@@ -34498,7 +34498,7 @@
                 </a:solidFill>
                 <a:latin typeface="PT Sans"/>
               </a:rPr>
-              <a:t>3-класс ›</a:t>
+              <a:t/>
             </a:r>
           </a:p>
           <a:p>
@@ -35244,7 +35244,7 @@
                 </a:solidFill>
                 <a:latin typeface="PT Sans"/>
               </a:rPr>
-              <a:t>3-класс ›</a:t>
+              <a:t/>
             </a:r>
           </a:p>
           <a:p>
@@ -36052,7 +36052,7 @@
                 </a:solidFill>
                 <a:latin typeface="PT Sans"/>
               </a:rPr>
-              <a:t>3-класс ›</a:t>
+              <a:t/>
             </a:r>
           </a:p>
           <a:p>
@@ -37243,7 +37243,7 @@
                 </a:solidFill>
                 <a:latin typeface="PT Sans"/>
               </a:rPr>
-              <a:t>3-класс ›</a:t>
+              <a:t/>
             </a:r>
           </a:p>
           <a:p>
@@ -38422,7 +38422,7 @@
                 </a:solidFill>
                 <a:latin typeface="PT Sans"/>
               </a:rPr>
-              <a:t>3-класс ›</a:t>
+              <a:t/>
             </a:r>
           </a:p>
           <a:p>
@@ -38603,7 +38603,7 @@
                 </a:solidFill>
                 <a:latin typeface="PT Sans"/>
               </a:rPr>
-              <a:t>2-класс</a:t>
+              <a:t/>
             </a:r>
           </a:p>
         </p:txBody>
@@ -38783,7 +38783,7 @@
                 </a:solidFill>
                 <a:latin typeface="PT Sans"/>
               </a:rPr>
-              <a:t>3-класс</a:t>
+              <a:t/>
             </a:r>
           </a:p>
         </p:txBody>
@@ -39019,7 +39019,7 @@
                 </a:solidFill>
                 <a:latin typeface="PT Sans"/>
               </a:rPr>
-              <a:t>4-класс</a:t>
+              <a:t/>
             </a:r>
           </a:p>
         </p:txBody>
@@ -39181,7 +39181,7 @@
                 </a:solidFill>
                 <a:latin typeface="PT Sans"/>
               </a:rPr>
-              <a:t>5-класс</a:t>
+              <a:t/>
             </a:r>
           </a:p>
         </p:txBody>
@@ -39582,7 +39582,7 @@
                 </a:solidFill>
                 <a:latin typeface="PT Sans"/>
               </a:rPr>
-              <a:t>3-класс ›</a:t>
+              <a:t/>
             </a:r>
           </a:p>
           <a:p>
@@ -40730,7 +40730,7 @@
                 </a:solidFill>
                 <a:latin typeface="PT Sans"/>
               </a:rPr>
-              <a:t>3-класс ›</a:t>
+              <a:t/>
             </a:r>
           </a:p>
           <a:p>

--- a/apps/resources/bundled_files/3-klass-jadybal-sabak-v2.pptx
+++ b/apps/resources/bundled_files/3-klass-jadybal-sabak-v2.pptx
@@ -1582,7 +1582,7 @@
           <a:lstStyle/>
           <a:p>
             <a:r>
-              <a:t>Ой жүгүртүү маданияты (Wenxi Lee, 2.6).</a:t>
+              <a:t>Ой жүгүртүү маданияты (Wenxi Lee, 2,6).</a:t>
             </a:r>
           </a:p>
         </p:txBody>
